--- a/slides/pptx/week06.pptx
+++ b/slides/pptx/week06.pptx
@@ -789,7 +789,8 @@
           <a:p>
             <a:r>
               <a:rPr lang="en-US" dirty="0"/>
-              <a:t>The thesis of the whole week, made concrete: JWT pitfalls broke Gate 1, IDOR broke Gate 2, and they're independent failures — fixing one doesn't fix the other. This is why "Defenses" lists both "verify JWT" and "check ownership" as separate bullets, not one fix. ~4 min.</a:t>
+              <a:t>The thesis of the whole week, made concrete: JWT pitfalls broke Gate 1, IDOR broke Gate 2, and they're independent failures — fixing one doesn't fix the other. This is why "Defenses" lists both "verify JWT" and "check ownership" as separate bullets, not one fix. ~4 min.
+Diagram: One HTTP request must pass two gates. Gate 1, authentication: verify the token's signature and algorithm — broken by alg:none and a weak hardcoded secret, so a forged token passes. Gate 2, authorization: does the caller own THIS object — broken because the ownership check never runs. The key point: even a perfectly valid, genuine token clears Gate 1 but must not be enough to clear Gate 2 on its own — alice's own valid login token can still read bob's order if Gate 2 is missing.</a:t>
             </a:r>
             <a:endParaRPr lang="en-US" dirty="0"/>
           </a:p>
@@ -2461,7 +2462,8 @@
           <a:p>
             <a:r>
               <a:rPr lang="en-US" dirty="0"/>
-              <a:t>Consolidation slide — leave it up during the JWT Forgery lab. It shows the whole story: the payload is always readable (blue), so the bug is never 'they saw the data' — it's a signature that wasn't verified. Point at the orange empty signature (alg:none) and the orange HMAC(secret) (weak key), then the blue fix line: pin HS256, strong secret, require exp+aud. Same story the jwt-forge sim animates live. Land the punch line: signed, not sealed. ~3 min.</a:t>
+              <a:t>Consolidation slide — leave it up during the JWT Forgery lab. It shows the whole story: the payload is always readable (blue), so the bug is never 'they saw the data' — it's a signature that wasn't verified. Point at the orange empty signature (alg:none) and the orange HMAC(secret) (weak key), then the blue fix line: pin HS256, strong secret, require exp+aud. Same story the jwt-forge sim animates live. Land the punch line: signed, not sealed. ~3 min.
+Diagram: A JWT is header.payload.signature in base64url: the header and payload are readable and editable by anyone, only the signature is a seal. Two forgeries: alg:none sets an empty signature and a vulnerable server skips the check and accepts sub:admin; a weak secret lets the attacker re-sign sub:admin so the signature verifies. The fix pins algorithms to HS256, uses a strong secret, and requires exp and aud, so both forged tokens return 401 — and because the check lives in current_user it covers every endpoint at once.</a:t>
             </a:r>
             <a:endParaRPr lang="en-US" dirty="0"/>
           </a:p>
@@ -2924,7 +2926,7 @@
       </p:grpSpPr>
       <p:pic>
         <p:nvPicPr>
-          <p:cNvPr id="2" name="Image 0" descr="/Users/pop7/Library/CloudStorage/OneDrive-MonsterConnectCo.,Ltd/Lecture/KOSEN69 - software-security/slides/pptx/assets/logo-small.png">    </p:cNvPr>
+          <p:cNvPr id="2" name="Image 0" descr="/private/tmp/claude-501/-Users-pop7-Library-CloudStorage-OneDrive-MonsterConnectCo--Ltd-Lecture-KOSEN69---software-security/e6d6556f-17de-403d-a9a0-cf2f846149b4/scratchpad/tree/slides/pptx/assets/logo-small.png">    </p:cNvPr>
           <p:cNvPicPr>
             <a:picLocks noChangeAspect="1"/>
           </p:cNvPicPr>
@@ -3409,7 +3411,7 @@
       </p:sp>
       <p:pic>
         <p:nvPicPr>
-          <p:cNvPr id="10" name="Image 1" descr="/Users/pop7/Library/CloudStorage/OneDrive-MonsterConnectCo.,Ltd/Lecture/KOSEN69 - software-security/slides/pptx/assets/logo-small.png">    </p:cNvPr>
+          <p:cNvPr id="10" name="Image 1" descr="/private/tmp/claude-501/-Users-pop7-Library-CloudStorage-OneDrive-MonsterConnectCo--Ltd-Lecture-KOSEN69---software-security/e6d6556f-17de-403d-a9a0-cf2f846149b4/scratchpad/tree/slides/pptx/assets/logo-small.png">    </p:cNvPr>
           <p:cNvPicPr>
             <a:picLocks noChangeAspect="1"/>
           </p:cNvPicPr>
@@ -3869,7 +3871,7 @@
       </p:sp>
       <p:pic>
         <p:nvPicPr>
-          <p:cNvPr id="10" name="Image 1" descr="/Users/pop7/Library/CloudStorage/OneDrive-MonsterConnectCo.,Ltd/Lecture/KOSEN69 - software-security/slides/pptx/assets/logo-small.png">    </p:cNvPr>
+          <p:cNvPr id="10" name="Image 1" descr="/private/tmp/claude-501/-Users-pop7-Library-CloudStorage-OneDrive-MonsterConnectCo--Ltd-Lecture-KOSEN69---software-security/e6d6556f-17de-403d-a9a0-cf2f846149b4/scratchpad/tree/slides/pptx/assets/logo-small.png">    </p:cNvPr>
           <p:cNvPicPr>
             <a:picLocks noChangeAspect="1"/>
           </p:cNvPicPr>
@@ -4013,16 +4015,40 @@
           </a:p>
         </p:txBody>
       </p:sp>
-      <p:sp>
-        <p:nvSpPr>
-          <p:cNvPr id="5" name="Text 2"/>
-          <p:cNvSpPr/>
-          <p:nvPr/>
-        </p:nvSpPr>
-        <p:spPr>
-          <a:xfrm>
-            <a:off x="548640" y="1325880"/>
-            <a:ext cx="8046720" cy="1920240"/>
+      <p:pic>
+        <p:nvPicPr>
+          <p:cNvPr id="5" name="Image 1" descr="One HTTP request must pass two gates. Gate 1, authentication: verify the token's signature and algorithm — broken by alg:none and a weak hardcoded secret, so a forged token passes. Gate 2, authorization: does the caller own THIS object — broken because the ownership check never runs. The key point: even a perfectly valid, genuine token clears Gate 1 but must not be enough to clear Gate 2 on its own — alice's own valid login token can still read bob's order if Gate 2 is missing.">    </p:cNvPr>
+          <p:cNvPicPr>
+            <a:picLocks noChangeAspect="1"/>
+          </p:cNvPicPr>
+          <p:nvPr/>
+        </p:nvPicPr>
+        <p:blipFill>
+          <a:blip r:embed="rId2"/>
+          <a:stretch>
+            <a:fillRect/>
+          </a:stretch>
+        </p:blipFill>
+        <p:spPr>
+          <a:xfrm>
+            <a:off x="2372364" y="1097280"/>
+            <a:ext cx="4399272" cy="3566160"/>
+          </a:xfrm>
+          <a:prstGeom prst="rect">
+            <a:avLst/>
+          </a:prstGeom>
+        </p:spPr>
+      </p:pic>
+      <p:sp>
+        <p:nvSpPr>
+          <p:cNvPr id="6" name="Text 2"/>
+          <p:cNvSpPr/>
+          <p:nvPr/>
+        </p:nvSpPr>
+        <p:spPr>
+          <a:xfrm>
+            <a:off x="457200" y="4800600"/>
+            <a:ext cx="6949440" cy="274320"/>
           </a:xfrm>
           <a:prstGeom prst="rect">
             <a:avLst/>
@@ -4031,62 +4057,21 @@
           <a:ln/>
         </p:spPr>
         <p:txBody>
-          <a:bodyPr wrap="square" lIns="0" tIns="0" rIns="0" bIns="0" rtlCol="0" anchor="t">
-            <a:normAutofit/>
-          </a:bodyPr>
+          <a:bodyPr wrap="square" lIns="0" tIns="0" rIns="0" bIns="0" rtlCol="0" anchor="ctr"/>
           <a:lstStyle/>
           <a:p>
             <a:pPr indent="0" marL="0">
               <a:buNone/>
             </a:pPr>
             <a:r>
-              <a:rPr lang="en-US" sz="1400" dirty="0">
-                <a:solidFill>
-                  <a:srgbClr val="1F2937"/>
+              <a:rPr lang="en-US" sz="900" dirty="0">
+                <a:solidFill>
+                  <a:srgbClr val="64748B"/>
                 </a:solidFill>
                 <a:latin typeface="Calibri" pitchFamily="34" charset="0"/>
                 <a:ea typeface="Calibri" pitchFamily="34" charset="-122"/>
                 <a:cs typeface="Calibri" pitchFamily="34" charset="-120"/>
               </a:rPr>
-              <a:t>See diagram: One HTTP request must pass two gates. Gate 1, authentication: verify the token's signature and algorithm — broken by alg:none and a weak hardcoded secret, so a forged token passes. Gate 2, authorization: does the caller own THIS object — broken because the ownership check never runs. The key point: even a perfectly valid, genuine token clears Gate 1 but must not be enough to clear Gate 2 on its own — alice's own valid login token can still read bob's order if Gate 2 is missing. (web only)</a:t>
-            </a:r>
-            <a:endParaRPr lang="en-US" sz="1400" dirty="0"/>
-          </a:p>
-        </p:txBody>
-      </p:sp>
-      <p:sp>
-        <p:nvSpPr>
-          <p:cNvPr id="6" name="Text 3"/>
-          <p:cNvSpPr/>
-          <p:nvPr/>
-        </p:nvSpPr>
-        <p:spPr>
-          <a:xfrm>
-            <a:off x="457200" y="4800600"/>
-            <a:ext cx="6949440" cy="274320"/>
-          </a:xfrm>
-          <a:prstGeom prst="rect">
-            <a:avLst/>
-          </a:prstGeom>
-          <a:noFill/>
-          <a:ln/>
-        </p:spPr>
-        <p:txBody>
-          <a:bodyPr wrap="square" lIns="0" tIns="0" rIns="0" bIns="0" rtlCol="0" anchor="ctr"/>
-          <a:lstStyle/>
-          <a:p>
-            <a:pPr indent="0" marL="0">
-              <a:buNone/>
-            </a:pPr>
-            <a:r>
-              <a:rPr lang="en-US" sz="900" dirty="0">
-                <a:solidFill>
-                  <a:srgbClr val="64748B"/>
-                </a:solidFill>
-                <a:latin typeface="Calibri" pitchFamily="34" charset="0"/>
-                <a:ea typeface="Calibri" pitchFamily="34" charset="-122"/>
-                <a:cs typeface="Calibri" pitchFamily="34" charset="-120"/>
-              </a:rPr>
               <a:t>Software Security · Week 6</a:t>
             </a:r>
             <a:endParaRPr lang="en-US" sz="900" dirty="0"/>
@@ -4095,14 +4080,14 @@
       </p:sp>
       <p:pic>
         <p:nvPicPr>
-          <p:cNvPr id="7" name="Image 1" descr="/Users/pop7/Library/CloudStorage/OneDrive-MonsterConnectCo.,Ltd/Lecture/KOSEN69 - software-security/slides/pptx/assets/logo-small.png">    </p:cNvPr>
+          <p:cNvPr id="7" name="Image 2" descr="/private/tmp/claude-501/-Users-pop7-Library-CloudStorage-OneDrive-MonsterConnectCo--Ltd-Lecture-KOSEN69---software-security/e6d6556f-17de-403d-a9a0-cf2f846149b4/scratchpad/tree/slides/pptx/assets/logo-small.png">    </p:cNvPr>
           <p:cNvPicPr>
             <a:picLocks noChangeAspect="1"/>
           </p:cNvPicPr>
           <p:nvPr/>
         </p:nvPicPr>
         <p:blipFill>
-          <a:blip r:embed="rId2"/>
+          <a:blip r:embed="rId3"/>
           <a:stretch>
             <a:fillRect/>
           </a:stretch>
@@ -4480,7 +4465,7 @@
       </p:sp>
       <p:pic>
         <p:nvPicPr>
-          <p:cNvPr id="10" name="Image 1" descr="/Users/pop7/Library/CloudStorage/OneDrive-MonsterConnectCo.,Ltd/Lecture/KOSEN69 - software-security/slides/pptx/assets/logo-small.png">    </p:cNvPr>
+          <p:cNvPr id="10" name="Image 1" descr="/private/tmp/claude-501/-Users-pop7-Library-CloudStorage-OneDrive-MonsterConnectCo--Ltd-Lecture-KOSEN69---software-security/e6d6556f-17de-403d-a9a0-cf2f846149b4/scratchpad/tree/slides/pptx/assets/logo-small.png">    </p:cNvPr>
           <p:cNvPicPr>
             <a:picLocks noChangeAspect="1"/>
           </p:cNvPicPr>
@@ -5415,7 +5400,7 @@
       </p:sp>
       <p:pic>
         <p:nvPicPr>
-          <p:cNvPr id="10" name="Image 1" descr="/Users/pop7/Library/CloudStorage/OneDrive-MonsterConnectCo.,Ltd/Lecture/KOSEN69 - software-security/slides/pptx/assets/logo-small.png">    </p:cNvPr>
+          <p:cNvPr id="10" name="Image 1" descr="/private/tmp/claude-501/-Users-pop7-Library-CloudStorage-OneDrive-MonsterConnectCo--Ltd-Lecture-KOSEN69---software-security/e6d6556f-17de-403d-a9a0-cf2f846149b4/scratchpad/tree/slides/pptx/assets/logo-small.png">    </p:cNvPr>
           <p:cNvPicPr>
             <a:picLocks noChangeAspect="1"/>
           </p:cNvPicPr>
@@ -5800,7 +5785,7 @@
       </p:sp>
       <p:pic>
         <p:nvPicPr>
-          <p:cNvPr id="12" name="Image 1" descr="/Users/pop7/Library/CloudStorage/OneDrive-MonsterConnectCo.,Ltd/Lecture/KOSEN69 - software-security/slides/pptx/assets/logo-small.png">    </p:cNvPr>
+          <p:cNvPr id="12" name="Image 1" descr="/private/tmp/claude-501/-Users-pop7-Library-CloudStorage-OneDrive-MonsterConnectCo--Ltd-Lecture-KOSEN69---software-security/e6d6556f-17de-403d-a9a0-cf2f846149b4/scratchpad/tree/slides/pptx/assets/logo-small.png">    </p:cNvPr>
           <p:cNvPicPr>
             <a:picLocks noChangeAspect="1"/>
           </p:cNvPicPr>
@@ -6202,7 +6187,7 @@
       </p:sp>
       <p:pic>
         <p:nvPicPr>
-          <p:cNvPr id="11" name="Image 1" descr="/Users/pop7/Library/CloudStorage/OneDrive-MonsterConnectCo.,Ltd/Lecture/KOSEN69 - software-security/slides/pptx/assets/logo-small.png">    </p:cNvPr>
+          <p:cNvPr id="11" name="Image 1" descr="/private/tmp/claude-501/-Users-pop7-Library-CloudStorage-OneDrive-MonsterConnectCo--Ltd-Lecture-KOSEN69---software-security/e6d6556f-17de-403d-a9a0-cf2f846149b4/scratchpad/tree/slides/pptx/assets/logo-small.png">    </p:cNvPr>
           <p:cNvPicPr>
             <a:picLocks noChangeAspect="1"/>
           </p:cNvPicPr>
@@ -6503,7 +6488,7 @@
       </p:sp>
       <p:pic>
         <p:nvPicPr>
-          <p:cNvPr id="8" name="Image 1" descr="/Users/pop7/Library/CloudStorage/OneDrive-MonsterConnectCo.,Ltd/Lecture/KOSEN69 - software-security/slides/pptx/assets/logo-small.png">    </p:cNvPr>
+          <p:cNvPr id="8" name="Image 1" descr="/private/tmp/claude-501/-Users-pop7-Library-CloudStorage-OneDrive-MonsterConnectCo--Ltd-Lecture-KOSEN69---software-security/e6d6556f-17de-403d-a9a0-cf2f846149b4/scratchpad/tree/slides/pptx/assets/logo-small.png">    </p:cNvPr>
           <p:cNvPicPr>
             <a:picLocks noChangeAspect="1"/>
           </p:cNvPicPr>
@@ -6867,7 +6852,7 @@
       </p:sp>
       <p:pic>
         <p:nvPicPr>
-          <p:cNvPr id="8" name="Image 1" descr="/Users/pop7/Library/CloudStorage/OneDrive-MonsterConnectCo.,Ltd/Lecture/KOSEN69 - software-security/slides/pptx/assets/logo-small.png">    </p:cNvPr>
+          <p:cNvPr id="8" name="Image 1" descr="/private/tmp/claude-501/-Users-pop7-Library-CloudStorage-OneDrive-MonsterConnectCo--Ltd-Lecture-KOSEN69---software-security/e6d6556f-17de-403d-a9a0-cf2f846149b4/scratchpad/tree/slides/pptx/assets/logo-small.png">    </p:cNvPr>
           <p:cNvPicPr>
             <a:picLocks noChangeAspect="1"/>
           </p:cNvPicPr>
@@ -7797,7 +7782,7 @@
       </p:sp>
       <p:pic>
         <p:nvPicPr>
-          <p:cNvPr id="9" name="Image 1" descr="/Users/pop7/Library/CloudStorage/OneDrive-MonsterConnectCo.,Ltd/Lecture/KOSEN69 - software-security/slides/pptx/assets/logo-small.png">    </p:cNvPr>
+          <p:cNvPr id="9" name="Image 1" descr="/private/tmp/claude-501/-Users-pop7-Library-CloudStorage-OneDrive-MonsterConnectCo--Ltd-Lecture-KOSEN69---software-security/e6d6556f-17de-403d-a9a0-cf2f846149b4/scratchpad/tree/slides/pptx/assets/logo-small.png">    </p:cNvPr>
           <p:cNvPicPr>
             <a:picLocks noChangeAspect="1"/>
           </p:cNvPicPr>
@@ -8140,7 +8125,7 @@
       </p:sp>
       <p:pic>
         <p:nvPicPr>
-          <p:cNvPr id="8" name="Image 1" descr="/Users/pop7/Library/CloudStorage/OneDrive-MonsterConnectCo.,Ltd/Lecture/KOSEN69 - software-security/slides/pptx/assets/logo-small.png">    </p:cNvPr>
+          <p:cNvPr id="8" name="Image 1" descr="/private/tmp/claude-501/-Users-pop7-Library-CloudStorage-OneDrive-MonsterConnectCo--Ltd-Lecture-KOSEN69---software-security/e6d6556f-17de-403d-a9a0-cf2f846149b4/scratchpad/tree/slides/pptx/assets/logo-small.png">    </p:cNvPr>
           <p:cNvPicPr>
             <a:picLocks noChangeAspect="1"/>
           </p:cNvPicPr>
@@ -8625,7 +8610,7 @@
       </p:sp>
       <p:pic>
         <p:nvPicPr>
-          <p:cNvPr id="15" name="Image 1" descr="/Users/pop7/Library/CloudStorage/OneDrive-MonsterConnectCo.,Ltd/Lecture/KOSEN69 - software-security/slides/pptx/assets/logo-small.png">    </p:cNvPr>
+          <p:cNvPr id="15" name="Image 1" descr="/private/tmp/claude-501/-Users-pop7-Library-CloudStorage-OneDrive-MonsterConnectCo--Ltd-Lecture-KOSEN69---software-security/e6d6556f-17de-403d-a9a0-cf2f846149b4/scratchpad/tree/slides/pptx/assets/logo-small.png">    </p:cNvPr>
           <p:cNvPicPr>
             <a:picLocks noChangeAspect="1"/>
           </p:cNvPicPr>
@@ -9273,7 +9258,7 @@
       </p:sp>
       <p:pic>
         <p:nvPicPr>
-          <p:cNvPr id="20" name="Image 1" descr="/Users/pop7/Library/CloudStorage/OneDrive-MonsterConnectCo.,Ltd/Lecture/KOSEN69 - software-security/slides/pptx/assets/logo-small.png">    </p:cNvPr>
+          <p:cNvPr id="20" name="Image 1" descr="/private/tmp/claude-501/-Users-pop7-Library-CloudStorage-OneDrive-MonsterConnectCo--Ltd-Lecture-KOSEN69---software-security/e6d6556f-17de-403d-a9a0-cf2f846149b4/scratchpad/tree/slides/pptx/assets/logo-small.png">    </p:cNvPr>
           <p:cNvPicPr>
             <a:picLocks noChangeAspect="1"/>
           </p:cNvPicPr>
@@ -9595,7 +9580,7 @@
       </p:sp>
       <p:pic>
         <p:nvPicPr>
-          <p:cNvPr id="8" name="Image 1" descr="/Users/pop7/Library/CloudStorage/OneDrive-MonsterConnectCo.,Ltd/Lecture/KOSEN69 - software-security/slides/pptx/assets/logo-small.png">    </p:cNvPr>
+          <p:cNvPr id="8" name="Image 1" descr="/private/tmp/claude-501/-Users-pop7-Library-CloudStorage-OneDrive-MonsterConnectCo--Ltd-Lecture-KOSEN69---software-security/e6d6556f-17de-403d-a9a0-cf2f846149b4/scratchpad/tree/slides/pptx/assets/logo-small.png">    </p:cNvPr>
           <p:cNvPicPr>
             <a:picLocks noChangeAspect="1"/>
           </p:cNvPicPr>
@@ -9896,7 +9881,7 @@
       </p:sp>
       <p:pic>
         <p:nvPicPr>
-          <p:cNvPr id="8" name="Image 1" descr="/Users/pop7/Library/CloudStorage/OneDrive-MonsterConnectCo.,Ltd/Lecture/KOSEN69 - software-security/slides/pptx/assets/logo-small.png">    </p:cNvPr>
+          <p:cNvPr id="8" name="Image 1" descr="/private/tmp/claude-501/-Users-pop7-Library-CloudStorage-OneDrive-MonsterConnectCo--Ltd-Lecture-KOSEN69---software-security/e6d6556f-17de-403d-a9a0-cf2f846149b4/scratchpad/tree/slides/pptx/assets/logo-small.png">    </p:cNvPr>
           <p:cNvPicPr>
             <a:picLocks noChangeAspect="1"/>
           </p:cNvPicPr>
@@ -10030,7 +10015,7 @@
       </p:sp>
       <p:pic>
         <p:nvPicPr>
-          <p:cNvPr id="4" name="Image 0" descr="/Users/pop7/Library/CloudStorage/OneDrive-MonsterConnectCo.,Ltd/Lecture/KOSEN69 - software-security/slides/pptx/assets/logo-small.png">    </p:cNvPr>
+          <p:cNvPr id="4" name="Image 0" descr="/private/tmp/claude-501/-Users-pop7-Library-CloudStorage-OneDrive-MonsterConnectCo--Ltd-Lecture-KOSEN69---software-security/e6d6556f-17de-403d-a9a0-cf2f846149b4/scratchpad/tree/slides/pptx/assets/logo-small.png">    </p:cNvPr>
           <p:cNvPicPr>
             <a:picLocks noChangeAspect="1"/>
           </p:cNvPicPr>
@@ -10310,7 +10295,7 @@
       </p:sp>
       <p:pic>
         <p:nvPicPr>
-          <p:cNvPr id="8" name="Image 1" descr="/Users/pop7/Library/CloudStorage/OneDrive-MonsterConnectCo.,Ltd/Lecture/KOSEN69 - software-security/slides/pptx/assets/logo-small.png">    </p:cNvPr>
+          <p:cNvPr id="8" name="Image 1" descr="/private/tmp/claude-501/-Users-pop7-Library-CloudStorage-OneDrive-MonsterConnectCo--Ltd-Lecture-KOSEN69---software-security/e6d6556f-17de-403d-a9a0-cf2f846149b4/scratchpad/tree/slides/pptx/assets/logo-small.png">    </p:cNvPr>
           <p:cNvPicPr>
             <a:picLocks noChangeAspect="1"/>
           </p:cNvPicPr>
@@ -10632,7 +10617,7 @@
       </p:sp>
       <p:pic>
         <p:nvPicPr>
-          <p:cNvPr id="8" name="Image 1" descr="/Users/pop7/Library/CloudStorage/OneDrive-MonsterConnectCo.,Ltd/Lecture/KOSEN69 - software-security/slides/pptx/assets/logo-small.png">    </p:cNvPr>
+          <p:cNvPr id="8" name="Image 1" descr="/private/tmp/claude-501/-Users-pop7-Library-CloudStorage-OneDrive-MonsterConnectCo--Ltd-Lecture-KOSEN69---software-security/e6d6556f-17de-403d-a9a0-cf2f846149b4/scratchpad/tree/slides/pptx/assets/logo-small.png">    </p:cNvPr>
           <p:cNvPicPr>
             <a:picLocks noChangeAspect="1"/>
           </p:cNvPicPr>
@@ -10954,7 +10939,7 @@
       </p:sp>
       <p:pic>
         <p:nvPicPr>
-          <p:cNvPr id="8" name="Image 1" descr="/Users/pop7/Library/CloudStorage/OneDrive-MonsterConnectCo.,Ltd/Lecture/KOSEN69 - software-security/slides/pptx/assets/logo-small.png">    </p:cNvPr>
+          <p:cNvPr id="8" name="Image 1" descr="/private/tmp/claude-501/-Users-pop7-Library-CloudStorage-OneDrive-MonsterConnectCo--Ltd-Lecture-KOSEN69---software-security/e6d6556f-17de-403d-a9a0-cf2f846149b4/scratchpad/tree/slides/pptx/assets/logo-small.png">    </p:cNvPr>
           <p:cNvPicPr>
             <a:picLocks noChangeAspect="1"/>
           </p:cNvPicPr>
@@ -11317,7 +11302,7 @@
       </p:sp>
       <p:pic>
         <p:nvPicPr>
-          <p:cNvPr id="9" name="Image 1" descr="/Users/pop7/Library/CloudStorage/OneDrive-MonsterConnectCo.,Ltd/Lecture/KOSEN69 - software-security/slides/pptx/assets/logo-small.png">    </p:cNvPr>
+          <p:cNvPr id="9" name="Image 1" descr="/private/tmp/claude-501/-Users-pop7-Library-CloudStorage-OneDrive-MonsterConnectCo--Ltd-Lecture-KOSEN69---software-security/e6d6556f-17de-403d-a9a0-cf2f846149b4/scratchpad/tree/slides/pptx/assets/logo-small.png">    </p:cNvPr>
           <p:cNvPicPr>
             <a:picLocks noChangeAspect="1"/>
           </p:cNvPicPr>
@@ -11777,7 +11762,7 @@
       </p:sp>
       <p:pic>
         <p:nvPicPr>
-          <p:cNvPr id="10" name="Image 1" descr="/Users/pop7/Library/CloudStorage/OneDrive-MonsterConnectCo.,Ltd/Lecture/KOSEN69 - software-security/slides/pptx/assets/logo-small.png">    </p:cNvPr>
+          <p:cNvPr id="10" name="Image 1" descr="/private/tmp/claude-501/-Users-pop7-Library-CloudStorage-OneDrive-MonsterConnectCo--Ltd-Lecture-KOSEN69---software-security/e6d6556f-17de-403d-a9a0-cf2f846149b4/scratchpad/tree/slides/pptx/assets/logo-small.png">    </p:cNvPr>
           <p:cNvPicPr>
             <a:picLocks noChangeAspect="1"/>
           </p:cNvPicPr>
@@ -11921,16 +11906,40 @@
           </a:p>
         </p:txBody>
       </p:sp>
-      <p:sp>
-        <p:nvSpPr>
-          <p:cNvPr id="5" name="Text 2"/>
-          <p:cNvSpPr/>
-          <p:nvPr/>
-        </p:nvSpPr>
-        <p:spPr>
-          <a:xfrm>
-            <a:off x="548640" y="1325880"/>
-            <a:ext cx="8046720" cy="2194560"/>
+      <p:pic>
+        <p:nvPicPr>
+          <p:cNvPr id="5" name="Image 1" descr="A JWT is header.payload.signature in base64url: the header and payload are readable and editable by anyone, only the signature is a seal. Two forgeries: alg:none sets an empty signature and a vulnerable server skips the check and accepts sub:admin; a weak secret lets the attacker re-sign sub:admin so the signature verifies. The fix pins algorithms to HS256, uses a strong secret, and requires exp and aud, so both forged tokens return 401 — and because the check lives in current_user it covers every endpoint at once.">    </p:cNvPr>
+          <p:cNvPicPr>
+            <a:picLocks noChangeAspect="1"/>
+          </p:cNvPicPr>
+          <p:nvPr/>
+        </p:nvPicPr>
+        <p:blipFill>
+          <a:blip r:embed="rId2"/>
+          <a:stretch>
+            <a:fillRect/>
+          </a:stretch>
+        </p:blipFill>
+        <p:spPr>
+          <a:xfrm>
+            <a:off x="2178604" y="1097280"/>
+            <a:ext cx="4786792" cy="3566160"/>
+          </a:xfrm>
+          <a:prstGeom prst="rect">
+            <a:avLst/>
+          </a:prstGeom>
+        </p:spPr>
+      </p:pic>
+      <p:sp>
+        <p:nvSpPr>
+          <p:cNvPr id="6" name="Text 2"/>
+          <p:cNvSpPr/>
+          <p:nvPr/>
+        </p:nvSpPr>
+        <p:spPr>
+          <a:xfrm>
+            <a:off x="457200" y="4800600"/>
+            <a:ext cx="6949440" cy="274320"/>
           </a:xfrm>
           <a:prstGeom prst="rect">
             <a:avLst/>
@@ -11939,62 +11948,21 @@
           <a:ln/>
         </p:spPr>
         <p:txBody>
-          <a:bodyPr wrap="square" lIns="0" tIns="0" rIns="0" bIns="0" rtlCol="0" anchor="t">
-            <a:normAutofit/>
-          </a:bodyPr>
+          <a:bodyPr wrap="square" lIns="0" tIns="0" rIns="0" bIns="0" rtlCol="0" anchor="ctr"/>
           <a:lstStyle/>
           <a:p>
             <a:pPr indent="0" marL="0">
               <a:buNone/>
             </a:pPr>
             <a:r>
-              <a:rPr lang="en-US" sz="1400" dirty="0">
-                <a:solidFill>
-                  <a:srgbClr val="1F2937"/>
+              <a:rPr lang="en-US" sz="900" dirty="0">
+                <a:solidFill>
+                  <a:srgbClr val="64748B"/>
                 </a:solidFill>
                 <a:latin typeface="Calibri" pitchFamily="34" charset="0"/>
                 <a:ea typeface="Calibri" pitchFamily="34" charset="-122"/>
                 <a:cs typeface="Calibri" pitchFamily="34" charset="-120"/>
               </a:rPr>
-              <a:t>See diagram: A JWT is header.payload.signature in base64url: the header and payload are readable and editable by anyone, only the signature is a seal. Two forgeries: alg:none sets an empty signature and a vulnerable server skips the check and accepts sub:admin; a weak secret lets the attacker re-sign sub:admin so the signature verifies. The fix pins algorithms to HS256, uses a strong secret, and requires exp and aud, so both forged tokens return 401 — and because the check lives in current_user it covers every endpoint at once. (web only)</a:t>
-            </a:r>
-            <a:endParaRPr lang="en-US" sz="1400" dirty="0"/>
-          </a:p>
-        </p:txBody>
-      </p:sp>
-      <p:sp>
-        <p:nvSpPr>
-          <p:cNvPr id="6" name="Text 3"/>
-          <p:cNvSpPr/>
-          <p:nvPr/>
-        </p:nvSpPr>
-        <p:spPr>
-          <a:xfrm>
-            <a:off x="457200" y="4800600"/>
-            <a:ext cx="6949440" cy="274320"/>
-          </a:xfrm>
-          <a:prstGeom prst="rect">
-            <a:avLst/>
-          </a:prstGeom>
-          <a:noFill/>
-          <a:ln/>
-        </p:spPr>
-        <p:txBody>
-          <a:bodyPr wrap="square" lIns="0" tIns="0" rIns="0" bIns="0" rtlCol="0" anchor="ctr"/>
-          <a:lstStyle/>
-          <a:p>
-            <a:pPr indent="0" marL="0">
-              <a:buNone/>
-            </a:pPr>
-            <a:r>
-              <a:rPr lang="en-US" sz="900" dirty="0">
-                <a:solidFill>
-                  <a:srgbClr val="64748B"/>
-                </a:solidFill>
-                <a:latin typeface="Calibri" pitchFamily="34" charset="0"/>
-                <a:ea typeface="Calibri" pitchFamily="34" charset="-122"/>
-                <a:cs typeface="Calibri" pitchFamily="34" charset="-120"/>
-              </a:rPr>
               <a:t>Software Security · Week 6</a:t>
             </a:r>
             <a:endParaRPr lang="en-US" sz="900" dirty="0"/>
@@ -12003,14 +11971,14 @@
       </p:sp>
       <p:pic>
         <p:nvPicPr>
-          <p:cNvPr id="7" name="Image 1" descr="/Users/pop7/Library/CloudStorage/OneDrive-MonsterConnectCo.,Ltd/Lecture/KOSEN69 - software-security/slides/pptx/assets/logo-small.png">    </p:cNvPr>
+          <p:cNvPr id="7" name="Image 2" descr="/private/tmp/claude-501/-Users-pop7-Library-CloudStorage-OneDrive-MonsterConnectCo--Ltd-Lecture-KOSEN69---software-security/e6d6556f-17de-403d-a9a0-cf2f846149b4/scratchpad/tree/slides/pptx/assets/logo-small.png">    </p:cNvPr>
           <p:cNvPicPr>
             <a:picLocks noChangeAspect="1"/>
           </p:cNvPicPr>
           <p:nvPr/>
         </p:nvPicPr>
         <p:blipFill>
-          <a:blip r:embed="rId2"/>
+          <a:blip r:embed="rId3"/>
           <a:stretch>
             <a:fillRect/>
           </a:stretch>
@@ -12304,7 +12272,7 @@
       </p:sp>
       <p:pic>
         <p:nvPicPr>
-          <p:cNvPr id="8" name="Image 1" descr="/Users/pop7/Library/CloudStorage/OneDrive-MonsterConnectCo.,Ltd/Lecture/KOSEN69 - software-security/slides/pptx/assets/logo-small.png">    </p:cNvPr>
+          <p:cNvPr id="8" name="Image 1" descr="/private/tmp/claude-501/-Users-pop7-Library-CloudStorage-OneDrive-MonsterConnectCo--Ltd-Lecture-KOSEN69---software-security/e6d6556f-17de-403d-a9a0-cf2f846149b4/scratchpad/tree/slides/pptx/assets/logo-small.png">    </p:cNvPr>
           <p:cNvPicPr>
             <a:picLocks noChangeAspect="1"/>
           </p:cNvPicPr>
